--- a/brand/jjp-client-proposal.pptx
+++ b/brand/jjp-client-proposal.pptx
@@ -113,33 +113,33 @@
   <p:extLst>
     <p:ext uri="{521415D9-36F7-43E2-AB2F-B90AF26B5E84}">
       <p14:sectionLst xmlns:p14="http://schemas.microsoft.com/office/powerpoint/2010/main">
-        <p14:section name="Cover" id="{aca7a853-6b5f-0f97-88f8-96023710b9ee}">
+        <p14:section name="Cover" id="{a34a9c00-9f93-f76c-c4f0-46aac29fb59f}">
           <p14:sldIdLst>
             <p14:sldId id="256"/>
           </p14:sldIdLst>
         </p14:section>
-        <p14:section name="Understanding" id="{417db410-5033-cd88-83ed-d7d61574c615}">
+        <p14:section name="Understanding" id="{9394a6f2-dcdc-8f2f-bd01-30e46236d4e5}">
           <p14:sldIdLst>
             <p14:sldId id="257"/>
             <p14:sldId id="258"/>
           </p14:sldIdLst>
         </p14:section>
-        <p14:section name="Approach" id="{6cb2f2c8-7ac6-80c7-5768-c13e58f0e260}">
+        <p14:section name="Approach" id="{05afa881-70ac-06bc-e277-043ded6a7383}">
           <p14:sldIdLst>
             <p14:sldId id="259"/>
           </p14:sldIdLst>
         </p14:section>
-        <p14:section name="Proof" id="{659ba21a-146d-e40e-7736-6db1f0db5e57}">
+        <p14:section name="Proof" id="{d0743120-081d-6efa-a4fa-5fe7a84d1e3e}">
           <p14:sldIdLst>
             <p14:sldId id="260"/>
           </p14:sldIdLst>
         </p14:section>
-        <p14:section name="Commercials" id="{f1eb7c2a-774e-d41f-c274-50120705f060}">
+        <p14:section name="Commercials" id="{198c403b-56ad-2b18-e4a5-dd81f7a00676}">
           <p14:sldIdLst>
             <p14:sldId id="261"/>
           </p14:sldIdLst>
         </p14:section>
-        <p14:section name="Close" id="{848d521a-649e-29f2-0666-61c859c764ec}">
+        <p14:section name="Close" id="{dca773ca-2c6f-35bf-0d65-476f0a50efc8}">
           <p14:sldIdLst>
             <p14:sldId id="262"/>
           </p14:sldIdLst>
@@ -2725,7 +2725,7 @@
                   <a:srgbClr val="6F6A5D"/>
                 </a:solidFill>
               </a:rPr>
-              <a:t>Say it back in their words. If they do not recognise it, the rest of the deck does not land.</a:t>
+              <a:t>Say it back in their words. If they do not recognize it, the rest of the deck does not land.</a:t>
             </a:r>
             <a:endParaRPr lang="en-US" sz="1250" dirty="0"/>
           </a:p>
